--- a/pitch/Aegis-Pitch-Deck.pptx
+++ b/pitch/Aegis-Pitch-Deck.pptx
@@ -4663,7 +4663,7 @@
                 </a:solidFill>
                 <a:latin typeface="Segoe UI"/>
               </a:rPr>
-              <a:t>90%</a:t>
+              <a:t>88%</a:t>
             </a:r>
           </a:p>
         </p:txBody>
@@ -5792,7 +5792,7 @@
                 </a:solidFill>
                 <a:latin typeface="Segoe UI"/>
               </a:rPr>
-              <a:t>Seed 1337 · 30,496 events · deterministic · the LLM touches none of these numbers.</a:t>
+              <a:t>Seed 1337 · 30,407 events · deterministic · the LLM touches none of these numbers.</a:t>
             </a:r>
           </a:p>
         </p:txBody>
@@ -6069,7 +6069,7 @@
                 </a:solidFill>
                 <a:latin typeface="Segoe UI"/>
               </a:rPr>
-              <a:t>100 attack + 100 benign runs </a:t>
+              <a:t>108 attack + 108 benign runs </a:t>
             </a:r>
             <a:r>
               <a:rPr sz="1250">
@@ -6243,7 +6243,7 @@
                 </a:solidFill>
                 <a:latin typeface="Segoe UI"/>
               </a:rPr>
-              <a:t>100</a:t>
+              <a:t>108</a:t>
             </a:r>
           </a:p>
         </p:txBody>
@@ -6621,7 +6621,7 @@
                 </a:solidFill>
                 <a:latin typeface="Segoe UI"/>
               </a:rPr>
-              <a:t>98</a:t>
+              <a:t>106</a:t>
             </a:r>
           </a:p>
         </p:txBody>
@@ -7387,7 +7387,7 @@
                 </a:solidFill>
                 <a:latin typeface="Segoe UI"/>
               </a:rPr>
-              <a:t>90%</a:t>
+              <a:t>88%</a:t>
             </a:r>
           </a:p>
         </p:txBody>
@@ -7513,7 +7513,7 @@
                 </a:solidFill>
                 <a:latin typeface="Segoe UI"/>
               </a:rPr>
-              <a:t>87%</a:t>
+              <a:t>84%</a:t>
             </a:r>
           </a:p>
         </p:txBody>
@@ -7639,7 +7639,7 @@
                 </a:solidFill>
                 <a:latin typeface="Segoe UI"/>
               </a:rPr>
-              <a:t>83%</a:t>
+              <a:t>80%</a:t>
             </a:r>
           </a:p>
         </p:txBody>
@@ -7765,7 +7765,7 @@
                 </a:solidFill>
                 <a:latin typeface="Segoe UI"/>
               </a:rPr>
-              <a:t>73%</a:t>
+              <a:t>74%</a:t>
             </a:r>
           </a:p>
         </p:txBody>
@@ -7969,7 +7969,7 @@
                 </a:solidFill>
                 <a:latin typeface="Segoe UI"/>
               </a:rPr>
-              <a:t>Detection latency: mean 767 ms · p95 2269 ms (full re-correlation per batch).  Detection engine sustains sub-millisecond per-event processing. All numbers reproducible via `make eval`.</a:t>
+              <a:t>Detection latency: mean 1211 ms · p95 3745 ms (full re-correlation per batch).  Detection engine sustains sub-millisecond per-event processing. All numbers reproducible via `make eval`.</a:t>
             </a:r>
           </a:p>
         </p:txBody>
